--- a/outputs/Req1_slides.pptx
+++ b/outputs/Req1_slides.pptx
@@ -3352,7 +3352,7 @@
               </a:defRPr>
             </a:pPr>
             <a:r>
-              <a:t>TEAM MEMBER NAMES  ·  Industrial Conveyor Reliability Data Challenge  ·  fleet: 284 conveyors × 20 years</a:t>
+              <a:t>Zoltan Hegyi, Jose Acosta Aldrete  ·  Industrial Conveyor Reliability Data Challenge  ·  fleet: 284 conveyors × 20 years</a:t>
             </a:r>
           </a:p>
         </p:txBody>
@@ -3653,7 +3653,7 @@
               </a:defRPr>
             </a:pPr>
             <a:r>
-              <a:t>TEAM MEMBER NAMES  ·  Industrial Conveyor Reliability Data Challenge  ·  fleet: 284 conveyors × 20 years</a:t>
+              <a:t>Zoltan Hegyi, Jose Acosta Aldrete  ·  Industrial Conveyor Reliability Data Challenge  ·  fleet: 284 conveyors × 20 years</a:t>
             </a:r>
           </a:p>
         </p:txBody>
